--- a/curso/pptx/S70.pptx
+++ b/curso/pptx/S70.pptx
@@ -5608,7 +5608,7 @@
                 </a:solidFill>
                 <a:latin typeface="Nunito Sans"/>
               </a:rPr>
-              <a:t>Móvil nuevo → funda, auriculares, reloj a juego</a:t>
+              <a:t>新手机 → 手机壳、耳机、配套的手表</a:t>
             </a:r>
           </a:p>
           <a:p>
@@ -5633,7 +5633,7 @@
                 </a:solidFill>
                 <a:latin typeface="Nunito Sans"/>
               </a:rPr>
-              <a:t>Consola nueva → otro mando, más juegos, silla gamer</a:t>
+              <a:t>新游戏机 → 另一个手柄、更多游戏、电竞椅</a:t>
             </a:r>
           </a:p>
           <a:p>
@@ -5658,7 +5658,7 @@
                 </a:solidFill>
                 <a:latin typeface="Nunito Sans"/>
               </a:rPr>
-              <a:t>Camiseta del Athletic → pantalón, bufanda, medias</a:t>
+              <a:t>毕尔巴鄂竞技的球衣 → 短裤、围巾、球袜</a:t>
             </a:r>
           </a:p>
           <a:p>
@@ -5683,7 +5683,7 @@
                 </a:solidFill>
                 <a:latin typeface="Nunito Sans"/>
               </a:rPr>
-              <a:t>Freno:</a:t>
+              <a:t>刹车：</a:t>
             </a:r>
             <a:r>
               <a:rPr sz="2800" b="0">
@@ -5692,7 +5692,7 @@
                 </a:solidFill>
                 <a:latin typeface="Nunito Sans"/>
               </a:rPr>
-              <a:t> ¿lo quiero por sí mismo, o solo para que «pegue»?</a:t>
+              <a:t>我想要它本身，还是只是为了让它“相配”？</a:t>
             </a:r>
           </a:p>
         </p:txBody>
@@ -7486,7 +7486,7 @@
                 </a:solidFill>
                 <a:latin typeface="Nunito Sans"/>
               </a:rPr>
-              <a:t>Comer, dormir, abrigarse, tener una casa</a:t>
+              <a:t>吃饭、睡觉、保暖、有一个家</a:t>
             </a:r>
           </a:p>
           <a:p>
@@ -7511,7 +7511,7 @@
                 </a:solidFill>
                 <a:latin typeface="Nunito Sans"/>
               </a:rPr>
-              <a:t>Aprender, tener amigos, sentirse seguro</a:t>
+              <a:t>学习、有朋友、感到安全</a:t>
             </a:r>
           </a:p>
           <a:p>
@@ -7536,7 +7536,7 @@
                 </a:solidFill>
                 <a:latin typeface="Nunito Sans"/>
               </a:rPr>
-              <a:t>Si falta, vivo peor de verdad</a:t>
+              <a:t>如果没有，我真的会过得更差</a:t>
             </a:r>
           </a:p>
         </p:txBody>
@@ -7779,7 +7779,7 @@
                 </a:solidFill>
                 <a:latin typeface="Nunito Sans"/>
               </a:rPr>
-              <a:t>La tercera sudadera de marca</a:t>
+              <a:t>第三件名牌卫衣</a:t>
             </a:r>
           </a:p>
           <a:p>
@@ -7804,7 +7804,7 @@
                 </a:solidFill>
                 <a:latin typeface="Nunito Sans"/>
               </a:rPr>
-              <a:t>El móvil del año, cuando el mío funciona</a:t>
+              <a:t>当年的最新款手机，而我的手机还能用</a:t>
             </a:r>
           </a:p>
           <a:p>
@@ -7829,7 +7829,7 @@
                 </a:solidFill>
                 <a:latin typeface="Nunito Sans"/>
               </a:rPr>
-              <a:t>Desear no es malo: todos deseamos cosas</a:t>
+              <a:t>有欲望并不坏：我们每个人都有想要的东西</a:t>
             </a:r>
           </a:p>
           <a:p>
@@ -7854,7 +7854,7 @@
                 </a:solidFill>
                 <a:latin typeface="Nunito Sans"/>
               </a:rPr>
-              <a:t>Pregunta clave: </a:t>
+              <a:t>关键问题：</a:t>
             </a:r>
             <a:r>
               <a:rPr sz="2800" b="1">
@@ -7863,7 +7863,7 @@
                 </a:solidFill>
                 <a:latin typeface="Nunito Sans"/>
               </a:rPr>
-              <a:t>¿qué pasa si no lo tengo?</a:t>
+              <a:t>如果我没有它，会怎么样？</a:t>
             </a:r>
           </a:p>
         </p:txBody>

--- a/curso/pptx/S70.pptx
+++ b/curso/pptx/S70.pptx
@@ -4493,7 +4493,7 @@
                 </a:solidFill>
                 <a:latin typeface="Nunito Sans"/>
               </a:rPr>
-              <a:t>奥马尔骑自行车摔倒了，他的手机坏了：开不了机。他训练完回来晚的时候，用它和家人联系。</a:t>
+              <a:t>一个男孩骑自行车摔倒了，他的手机坏了：开不了机。他训练完回来晚的时候，用它和家人联系。</a:t>
             </a:r>
           </a:p>
         </p:txBody>
@@ -7100,7 +7100,7 @@
                 </a:solidFill>
                 <a:latin typeface="Nunito Sans"/>
               </a:rPr>
-              <a:t>伊克尔说：“我需要TikTok上出现的那双新球鞋。”他的鞋才买了三个月，还好好的。</a:t>
+              <a:t>一个男孩说：“我需要TikTok上出现的那双新球鞋。”他的鞋才买了三个月，还好好的。</a:t>
             </a:r>
           </a:p>
         </p:txBody>
